--- a/AI_Governance_Copilot_Presentation.pptx
+++ b/AI_Governance_Copilot_Presentation.pptx
@@ -28,6 +28,9 @@
     <p:sldId id="276" r:id="rId27"/>
     <p:sldId id="277" r:id="rId28"/>
     <p:sldId id="278" r:id="rId29"/>
+    <p:sldId id="279" r:id="rId30"/>
+    <p:sldId id="280" r:id="rId31"/>
+    <p:sldId id="281" r:id="rId32"/>
   </p:sldIdLst>
   <p:sldSz cx="9144000" cy="6858000" type="screen4x3"/>
   <p:notesSz cx="6858000" cy="9144000"/>
@@ -3191,7 +3194,7 @@
           <a:lstStyle/>
           <a:p>
             <a:r>
-              <a:t>9. Agent Pipeline Step 1: Parsing</a:t>
+              <a:t>9. Data Pipeline: Building the Corpus</a:t>
             </a:r>
           </a:p>
         </p:txBody>
@@ -3212,25 +3215,25 @@
           <a:lstStyle/>
           <a:p>
             <a:r>
-              <a:t>Raw draft policy text is ingested through the UI.</a:t>
-            </a:r>
-          </a:p>
-          <a:p>
-            <a:pPr/>
-            <a:r>
-              <a:t>Input is truncated at 100K characters for memory safety.</a:t>
-            </a:r>
-          </a:p>
-          <a:p>
-            <a:pPr/>
-            <a:r>
-              <a:t>Splits text into discrete, sentence-level actionable clauses.</a:t>
-            </a:r>
-          </a:p>
-          <a:p>
-            <a:pPr/>
-            <a:r>
-              <a:t>Uses spaCy for robust NLP sentence boundary detection, falling back to Regex.</a:t>
+              <a:t>Ingestion: Automated extraction of provisions from EUR-Lex PDFs and HTML via PyMuPDF and BeautifulSoup.</a:t>
+            </a:r>
+          </a:p>
+          <a:p>
+            <a:pPr/>
+            <a:r>
+              <a:t>Cleaning: Semantic chunking ensures clauses retain critical context.</a:t>
+            </a:r>
+          </a:p>
+          <a:p>
+            <a:pPr/>
+            <a:r>
+              <a:t>Embedding: Text converted into 384-dimensional dense vectors upon ingestion.</a:t>
+            </a:r>
+          </a:p>
+          <a:p>
+            <a:pPr/>
+            <a:r>
+              <a:t>Database syncing: Automatic population of Supabase and updating of the FAISS index.</a:t>
             </a:r>
           </a:p>
         </p:txBody>
@@ -3269,7 +3272,7 @@
           <a:lstStyle/>
           <a:p>
             <a:r>
-              <a:t>10. Agent Pipeline Step 2: Classification</a:t>
+              <a:t>10. Vector Search &amp; Embeddings</a:t>
             </a:r>
           </a:p>
         </p:txBody>
@@ -3290,31 +3293,25 @@
           <a:lstStyle/>
           <a:p>
             <a:r>
-              <a:t>Automatically tags each parsed clause using heuristic rules.</a:t>
-            </a:r>
-          </a:p>
-          <a:p>
-            <a:pPr/>
-            <a:r>
-              <a:t>Axes of Classification: Risk Type, Actor Type, Obligation Type.</a:t>
-            </a:r>
-          </a:p>
-          <a:p>
-            <a:pPr/>
-            <a:r>
-              <a:t>Risk Types: High, Unacceptable, Limited, Minimal.</a:t>
-            </a:r>
-          </a:p>
-          <a:p>
-            <a:pPr/>
-            <a:r>
-              <a:t>Actor Types: Provider, Deployer, Importer, Distributor.</a:t>
-            </a:r>
-          </a:p>
-          <a:p>
-            <a:pPr/>
-            <a:r>
-              <a:t>Obligation Types: Transparency, Reporting, Testing, Data Gov.</a:t>
+              <a:t>Utilizes 'all-MiniLM-L6-v2' for fast, lightweight embedding generation.</a:t>
+            </a:r>
+          </a:p>
+          <a:p>
+            <a:pPr/>
+            <a:r>
+              <a:t>Creates 384-dimensional dense vectors for semantic similarity.</a:t>
+            </a:r>
+          </a:p>
+          <a:p>
+            <a:pPr/>
+            <a:r>
+              <a:t>FAISS IndexFlatIP used for rapid nearest-neighbor retrieval.</a:t>
+            </a:r>
+          </a:p>
+          <a:p>
+            <a:pPr/>
+            <a:r>
+              <a:t>Enables context-aware matching beyond exact keyword searches.</a:t>
             </a:r>
           </a:p>
         </p:txBody>
@@ -3353,7 +3350,7 @@
           <a:lstStyle/>
           <a:p>
             <a:r>
-              <a:t>11. Agent Pipeline Step 3: Coverage Checking</a:t>
+              <a:t>11. Agent Pipeline Step 1: Parsing</a:t>
             </a:r>
           </a:p>
         </p:txBody>
@@ -3374,25 +3371,25 @@
           <a:lstStyle/>
           <a:p>
             <a:r>
-              <a:t>Evaluates classified clauses against a predefined matrix of requirements.</a:t>
-            </a:r>
-          </a:p>
-          <a:p>
-            <a:pPr/>
-            <a:r>
-              <a:t>Checks essential domains: Biometrics, Incident Reporting, Risk Testing, etc.</a:t>
-            </a:r>
-          </a:p>
-          <a:p>
-            <a:pPr/>
-            <a:r>
-              <a:t>Labels each domain as 'Covered' or a 'Gap'.</a:t>
-            </a:r>
-          </a:p>
-          <a:p>
-            <a:pPr/>
-            <a:r>
-              <a:t>Outputs a detailed grid representing the overall health of the policy.</a:t>
+              <a:t>Raw draft policy text is ingested through the UI.</a:t>
+            </a:r>
+          </a:p>
+          <a:p>
+            <a:pPr/>
+            <a:r>
+              <a:t>Input is truncated at 100K characters for memory safety.</a:t>
+            </a:r>
+          </a:p>
+          <a:p>
+            <a:pPr/>
+            <a:r>
+              <a:t>Splits text into discrete, sentence-level actionable clauses.</a:t>
+            </a:r>
+          </a:p>
+          <a:p>
+            <a:pPr/>
+            <a:r>
+              <a:t>Uses spaCy for robust NLP sentence boundary detection, falling back to Regex.</a:t>
             </a:r>
           </a:p>
         </p:txBody>
@@ -3431,7 +3428,7 @@
           <a:lstStyle/>
           <a:p>
             <a:r>
-              <a:t>12. Agent Pipeline Step 4: Conflict Detection</a:t>
+              <a:t>12. Agent Pipeline Step 2: Classification</a:t>
             </a:r>
           </a:p>
         </p:txBody>
@@ -3452,25 +3449,31 @@
           <a:lstStyle/>
           <a:p>
             <a:r>
-              <a:t>Cross-references the draft clauses against the EU/India vector database.</a:t>
-            </a:r>
-          </a:p>
-          <a:p>
-            <a:pPr/>
-            <a:r>
-              <a:t>Detects instances where draft text contradicts established law.</a:t>
-            </a:r>
-          </a:p>
-          <a:p>
-            <a:pPr/>
-            <a:r>
-              <a:t>Assigns Severity levels (High, Medium, Low) based on semantic similarity.</a:t>
-            </a:r>
-          </a:p>
-          <a:p>
-            <a:pPr/>
-            <a:r>
-              <a:t>Flags specific regulatory collisions across borders.</a:t>
+              <a:t>Automatically tags each parsed clause using heuristic rules.</a:t>
+            </a:r>
+          </a:p>
+          <a:p>
+            <a:pPr/>
+            <a:r>
+              <a:t>Axes of Classification: Risk Type, Actor Type, Obligation Type.</a:t>
+            </a:r>
+          </a:p>
+          <a:p>
+            <a:pPr/>
+            <a:r>
+              <a:t>Risk Types: High, Unacceptable, Limited, Minimal.</a:t>
+            </a:r>
+          </a:p>
+          <a:p>
+            <a:pPr/>
+            <a:r>
+              <a:t>Actor Types: Provider, Deployer, Importer, Distributor.</a:t>
+            </a:r>
+          </a:p>
+          <a:p>
+            <a:pPr/>
+            <a:r>
+              <a:t>Obligation Types: Transparency, Reporting, Testing, Data Gov.</a:t>
             </a:r>
           </a:p>
         </p:txBody>
@@ -3509,7 +3512,7 @@
           <a:lstStyle/>
           <a:p>
             <a:r>
-              <a:t>13. Conflict Detection Deep Dive</a:t>
+              <a:t>13. Agent Pipeline Step 3: Coverage Checking</a:t>
             </a:r>
           </a:p>
         </p:txBody>
@@ -3530,25 +3533,25 @@
           <a:lstStyle/>
           <a:p>
             <a:r>
-              <a:t>Similarity Score 0.90+: High Severity Conflict (Red).</a:t>
-            </a:r>
-          </a:p>
-          <a:p>
-            <a:pPr/>
-            <a:r>
-              <a:t>Similarity Score 0.80 - 0.89: Medium Severity Conflict (Amber).</a:t>
-            </a:r>
-          </a:p>
-          <a:p>
-            <a:pPr/>
-            <a:r>
-              <a:t>&lt; 0.80: Low Severity / Contextual mismatch (Green).</a:t>
-            </a:r>
-          </a:p>
-          <a:p>
-            <a:pPr/>
-            <a:r>
-              <a:t>Provides line-by-line evidence comparing draft vs. law excerpt.</a:t>
+              <a:t>Evaluates classified clauses against a predefined matrix of requirements.</a:t>
+            </a:r>
+          </a:p>
+          <a:p>
+            <a:pPr/>
+            <a:r>
+              <a:t>Checks essential domains: Biometrics, Incident Reporting, Risk Testing, etc.</a:t>
+            </a:r>
+          </a:p>
+          <a:p>
+            <a:pPr/>
+            <a:r>
+              <a:t>Labels each domain as 'Covered' or a 'Gap'.</a:t>
+            </a:r>
+          </a:p>
+          <a:p>
+            <a:pPr/>
+            <a:r>
+              <a:t>Outputs a detailed grid representing the overall health of the policy.</a:t>
             </a:r>
           </a:p>
         </p:txBody>
@@ -3587,7 +3590,7 @@
           <a:lstStyle/>
           <a:p>
             <a:r>
-              <a:t>14. Agent Pipeline Step 5: Recommendations</a:t>
+              <a:t>14. Agent Pipeline Step 4: Conflict Detection</a:t>
             </a:r>
           </a:p>
         </p:txBody>
@@ -3608,25 +3611,25 @@
           <a:lstStyle/>
           <a:p>
             <a:r>
-              <a:t>Generates actionable guidance to resolve identified gaps and conflicts.</a:t>
-            </a:r>
-          </a:p>
-          <a:p>
-            <a:pPr/>
-            <a:r>
-              <a:t>Context-aware: Recommends specific language based on the missed areas.</a:t>
-            </a:r>
-          </a:p>
-          <a:p>
-            <a:pPr/>
-            <a:r>
-              <a:t>Highlights priority gaps that must be addressed immediately.</a:t>
-            </a:r>
-          </a:p>
-          <a:p>
-            <a:pPr/>
-            <a:r>
-              <a:t>Powers the three-tiered Policy Alignment Options.</a:t>
+              <a:t>Cross-references the draft clauses against the EU/India vector database.</a:t>
+            </a:r>
+          </a:p>
+          <a:p>
+            <a:pPr/>
+            <a:r>
+              <a:t>Detects instances where draft text contradicts established law.</a:t>
+            </a:r>
+          </a:p>
+          <a:p>
+            <a:pPr/>
+            <a:r>
+              <a:t>Assigns Severity levels (High, Medium, Low) based on semantic similarity.</a:t>
+            </a:r>
+          </a:p>
+          <a:p>
+            <a:pPr/>
+            <a:r>
+              <a:t>Flags specific regulatory collisions across borders.</a:t>
             </a:r>
           </a:p>
         </p:txBody>
@@ -3665,7 +3668,7 @@
           <a:lstStyle/>
           <a:p>
             <a:r>
-              <a:t>15. Policy Alignment Option Cards</a:t>
+              <a:t>15. Conflict Detection Deep Dive</a:t>
             </a:r>
           </a:p>
         </p:txBody>
@@ -3686,25 +3689,25 @@
           <a:lstStyle/>
           <a:p>
             <a:r>
-              <a:t>Minimal Tier: Baseline fixes to achieve absolute minimum compliance.</a:t>
-            </a:r>
-          </a:p>
-          <a:p>
-            <a:pPr/>
-            <a:r>
-              <a:t>Moderate Tier: Industry-standard alignment, balancing safety and speed.</a:t>
-            </a:r>
-          </a:p>
-          <a:p>
-            <a:pPr/>
-            <a:r>
-              <a:t>Strict Tier: Maximum rigor, exceeding baseline laws for high-risk domains.</a:t>
-            </a:r>
-          </a:p>
-          <a:p>
-            <a:pPr/>
-            <a:r>
-              <a:t>Each tier provides custom sample language for immediate insertion.</a:t>
+              <a:t>Similarity Score 0.90+: High Severity Conflict (Red).</a:t>
+            </a:r>
+          </a:p>
+          <a:p>
+            <a:pPr/>
+            <a:r>
+              <a:t>Similarity Score 0.80 - 0.89: Medium Severity Conflict (Amber).</a:t>
+            </a:r>
+          </a:p>
+          <a:p>
+            <a:pPr/>
+            <a:r>
+              <a:t>&lt; 0.80: Low Severity / Contextual mismatch (Green).</a:t>
+            </a:r>
+          </a:p>
+          <a:p>
+            <a:pPr/>
+            <a:r>
+              <a:t>Provides line-by-line evidence comparing draft vs. law excerpt.</a:t>
             </a:r>
           </a:p>
         </p:txBody>
@@ -3743,7 +3746,7 @@
           <a:lstStyle/>
           <a:p>
             <a:r>
-              <a:t>16. Streamlit UI: Premium Experience</a:t>
+              <a:t>16. Agent Pipeline Step 5: Recommendations</a:t>
             </a:r>
           </a:p>
         </p:txBody>
@@ -3764,25 +3767,25 @@
           <a:lstStyle/>
           <a:p>
             <a:r>
-              <a:t>Custom dark-mode design system with responsive card layouts.</a:t>
-            </a:r>
-          </a:p>
-          <a:p>
-            <a:pPr/>
-            <a:r>
-              <a:t>Interactive Executive Summary with high-level metrics (Clauses, Coverage %).</a:t>
-            </a:r>
-          </a:p>
-          <a:p>
-            <a:pPr/>
-            <a:r>
-              <a:t>Color-coded visual indicators (CSS badges, severity pills).</a:t>
-            </a:r>
-          </a:p>
-          <a:p>
-            <a:pPr/>
-            <a:r>
-              <a:t>Interactive expanders to review how the agent classified raw text.</a:t>
+              <a:t>Generates actionable guidance to resolve identified gaps and conflicts.</a:t>
+            </a:r>
+          </a:p>
+          <a:p>
+            <a:pPr/>
+            <a:r>
+              <a:t>Context-aware: Recommends specific language based on the missed areas.</a:t>
+            </a:r>
+          </a:p>
+          <a:p>
+            <a:pPr/>
+            <a:r>
+              <a:t>Highlights priority gaps that must be addressed immediately.</a:t>
+            </a:r>
+          </a:p>
+          <a:p>
+            <a:pPr/>
+            <a:r>
+              <a:t>Powers the three-tiered Policy Alignment Options.</a:t>
             </a:r>
           </a:p>
         </p:txBody>
@@ -3821,7 +3824,7 @@
           <a:lstStyle/>
           <a:p>
             <a:r>
-              <a:t>17. System Resiliency &amp; Error Handling</a:t>
+              <a:t>17. Policy Alignment Option Cards</a:t>
             </a:r>
           </a:p>
         </p:txBody>
@@ -3842,25 +3845,25 @@
           <a:lstStyle/>
           <a:p>
             <a:r>
-              <a:t>Input Validation: Rejects empty inputs and truncates extreme lengths.</a:t>
-            </a:r>
-          </a:p>
-          <a:p>
-            <a:pPr/>
-            <a:r>
-              <a:t>Timeout Hardening: Handles API delays during heavy embedding loads.</a:t>
-            </a:r>
-          </a:p>
-          <a:p>
-            <a:pPr/>
-            <a:r>
-              <a:t>Graceful Degradation: Handles missing database connections safely.</a:t>
-            </a:r>
-          </a:p>
-          <a:p>
-            <a:pPr/>
-            <a:r>
-              <a:t>Clear user feedback via styled error cards in the UI.</a:t>
+              <a:t>Minimal Tier: Baseline fixes to achieve absolute minimum compliance.</a:t>
+            </a:r>
+          </a:p>
+          <a:p>
+            <a:pPr/>
+            <a:r>
+              <a:t>Moderate Tier: Industry-standard alignment, balancing safety and speed.</a:t>
+            </a:r>
+          </a:p>
+          <a:p>
+            <a:pPr/>
+            <a:r>
+              <a:t>Strict Tier: Maximum rigor, exceeding baseline laws for high-risk domains.</a:t>
+            </a:r>
+          </a:p>
+          <a:p>
+            <a:pPr/>
+            <a:r>
+              <a:t>Each tier provides custom sample language for immediate insertion.</a:t>
             </a:r>
           </a:p>
         </p:txBody>
@@ -3899,7 +3902,7 @@
           <a:lstStyle/>
           <a:p>
             <a:r>
-              <a:t>18. Audit Trails &amp; Export (ReportLab)</a:t>
+              <a:t>18. Streamlit UI: Premium Experience</a:t>
             </a:r>
           </a:p>
         </p:txBody>
@@ -3920,25 +3923,25 @@
           <a:lstStyle/>
           <a:p>
             <a:r>
-              <a:t>Automatic generation of timestamped PDF compliance reports.</a:t>
-            </a:r>
-          </a:p>
-          <a:p>
-            <a:pPr/>
-            <a:r>
-              <a:t>Includes coverage matrix, conflict signals, and recommended policies.</a:t>
-            </a:r>
-          </a:p>
-          <a:p>
-            <a:pPr/>
-            <a:r>
-              <a:t>Provides a verifiable artifact for legal teams and board reviews.</a:t>
-            </a:r>
-          </a:p>
-          <a:p>
-            <a:pPr/>
-            <a:r>
-              <a:t>Maintains persistence via database reporting IDs.</a:t>
+              <a:t>Custom dark-mode design system with responsive card layouts.</a:t>
+            </a:r>
+          </a:p>
+          <a:p>
+            <a:pPr/>
+            <a:r>
+              <a:t>Interactive Executive Summary with high-level metrics (Clauses, Coverage %).</a:t>
+            </a:r>
+          </a:p>
+          <a:p>
+            <a:pPr/>
+            <a:r>
+              <a:t>Color-coded visual indicators (CSS badges, severity pills).</a:t>
+            </a:r>
+          </a:p>
+          <a:p>
+            <a:pPr/>
+            <a:r>
+              <a:t>Interactive expanders to review how the agent classified raw text.</a:t>
             </a:r>
           </a:p>
         </p:txBody>
@@ -4055,7 +4058,7 @@
           <a:lstStyle/>
           <a:p>
             <a:r>
-              <a:t>19. Sample Case: Automated Recruitment</a:t>
+              <a:t>19. System Resiliency &amp; Error Handling</a:t>
             </a:r>
           </a:p>
         </p:txBody>
@@ -4076,25 +4079,25 @@
           <a:lstStyle/>
           <a:p>
             <a:r>
-              <a:t>Scenario: AI for automated recruitment screening across EU and India.</a:t>
-            </a:r>
-          </a:p>
-          <a:p>
-            <a:pPr/>
-            <a:r>
-              <a:t>Risk Identified: High-Risk biometric verification.</a:t>
-            </a:r>
-          </a:p>
-          <a:p>
-            <a:pPr/>
-            <a:r>
-              <a:t>Action: Triggers mandatory pre-deployment testing and transparency checks.</a:t>
-            </a:r>
-          </a:p>
-          <a:p>
-            <a:pPr/>
-            <a:r>
-              <a:t>Result: Conflict maps ensure both EU AI Act and India DPDP are met.</a:t>
+              <a:t>Input Validation: Rejects empty inputs and truncates extreme lengths.</a:t>
+            </a:r>
+          </a:p>
+          <a:p>
+            <a:pPr/>
+            <a:r>
+              <a:t>Timeout Hardening: Handles API delays during heavy embedding loads.</a:t>
+            </a:r>
+          </a:p>
+          <a:p>
+            <a:pPr/>
+            <a:r>
+              <a:t>Graceful Degradation: Handles missing database connections safely.</a:t>
+            </a:r>
+          </a:p>
+          <a:p>
+            <a:pPr/>
+            <a:r>
+              <a:t>Clear user feedback via styled error cards in the UI.</a:t>
             </a:r>
           </a:p>
         </p:txBody>
@@ -4133,7 +4136,7 @@
           <a:lstStyle/>
           <a:p>
             <a:r>
-              <a:t>20. Extensibility &amp; Future Roadmap</a:t>
+              <a:t>20. Audit Trails &amp; Export (ReportLab)</a:t>
             </a:r>
           </a:p>
         </p:txBody>
@@ -4154,25 +4157,25 @@
           <a:lstStyle/>
           <a:p>
             <a:r>
-              <a:t>Keyword classifiers can be seamlessly upgraded to fine-tuned LLMs.</a:t>
-            </a:r>
-          </a:p>
-          <a:p>
-            <a:pPr/>
-            <a:r>
-              <a:t>New regions (e.g., US NIST, APAC rules) easily injected into Supabase.</a:t>
-            </a:r>
-          </a:p>
-          <a:p>
-            <a:pPr/>
-            <a:r>
-              <a:t>Direct integration with CI/CD pipelines to scan 'Policy-as-Code'.</a:t>
-            </a:r>
-          </a:p>
-          <a:p>
-            <a:pPr/>
-            <a:r>
-              <a:t>Multi-lingual embedding models for non-English regulatory texts.</a:t>
+              <a:t>Automatic generation of timestamped PDF compliance reports.</a:t>
+            </a:r>
+          </a:p>
+          <a:p>
+            <a:pPr/>
+            <a:r>
+              <a:t>Includes coverage matrix, conflict signals, and recommended policies.</a:t>
+            </a:r>
+          </a:p>
+          <a:p>
+            <a:pPr/>
+            <a:r>
+              <a:t>Provides a verifiable artifact for legal teams and board reviews.</a:t>
+            </a:r>
+          </a:p>
+          <a:p>
+            <a:pPr/>
+            <a:r>
+              <a:t>Maintains persistence via database reporting IDs.</a:t>
             </a:r>
           </a:p>
         </p:txBody>
@@ -4211,7 +4214,7 @@
           <a:lstStyle/>
           <a:p>
             <a:r>
-              <a:t>21. Business Value &amp; Impact</a:t>
+              <a:t>21. Sample Case: Automated Recruitment</a:t>
             </a:r>
           </a:p>
         </p:txBody>
@@ -4232,25 +4235,25 @@
           <a:lstStyle/>
           <a:p>
             <a:r>
-              <a:t>Accelerates compliance audits from weeks to seconds.</a:t>
-            </a:r>
-          </a:p>
-          <a:p>
-            <a:pPr/>
-            <a:r>
-              <a:t>Reduces cross-border legal risk for multinational AI rollouts.</a:t>
-            </a:r>
-          </a:p>
-          <a:p>
-            <a:pPr/>
-            <a:r>
-              <a:t>Provides unified visibility into the organization's regulatory posture.</a:t>
-            </a:r>
-          </a:p>
-          <a:p>
-            <a:pPr/>
-            <a:r>
-              <a:t>Ensures decisions are grounded in actual, current legislation.</a:t>
+              <a:t>Scenario: AI for automated recruitment screening across EU and India.</a:t>
+            </a:r>
+          </a:p>
+          <a:p>
+            <a:pPr/>
+            <a:r>
+              <a:t>Risk Identified: High-Risk biometric verification.</a:t>
+            </a:r>
+          </a:p>
+          <a:p>
+            <a:pPr/>
+            <a:r>
+              <a:t>Action: Triggers mandatory pre-deployment testing and transparency checks.</a:t>
+            </a:r>
+          </a:p>
+          <a:p>
+            <a:pPr/>
+            <a:r>
+              <a:t>Result: Conflict maps ensure both EU AI Act and India DPDP are met.</a:t>
             </a:r>
           </a:p>
         </p:txBody>
@@ -4289,7 +4292,241 @@
           <a:lstStyle/>
           <a:p>
             <a:r>
-              <a:t>22. Conclusion</a:t>
+              <a:t>22. Return on Investment (ROI)</a:t>
+            </a:r>
+          </a:p>
+        </p:txBody>
+      </p:sp>
+      <p:sp>
+        <p:nvSpPr>
+          <p:cNvPr id="3" name="Content Placeholder 2"/>
+          <p:cNvSpPr>
+            <a:spLocks noGrp="1"/>
+          </p:cNvSpPr>
+          <p:nvPr>
+            <p:ph idx="1"/>
+          </p:nvPr>
+        </p:nvSpPr>
+        <p:spPr/>
+        <p:txBody>
+          <a:bodyPr/>
+          <a:lstStyle/>
+          <a:p>
+            <a:r>
+              <a:t>Time Savings: Reduces multi-jurisdictional review time from weeks to seconds.</a:t>
+            </a:r>
+          </a:p>
+          <a:p>
+            <a:pPr/>
+            <a:r>
+              <a:t>Cost Efficiency: Decreases reliance on costly external legal counsel for preliminary drafts.</a:t>
+            </a:r>
+          </a:p>
+          <a:p>
+            <a:pPr/>
+            <a:r>
+              <a:t>Risk Mitigation: Prevents fines amounting to percentages of global turnover.</a:t>
+            </a:r>
+          </a:p>
+          <a:p>
+            <a:pPr/>
+            <a:r>
+              <a:t>Scalability: Enables rapid market expansion without proportional legal overhead.</a:t>
+            </a:r>
+          </a:p>
+        </p:txBody>
+      </p:sp>
+    </p:spTree>
+  </p:cSld>
+  <p:clrMapOvr>
+    <a:masterClrMapping/>
+  </p:clrMapOvr>
+</p:sld>
+</file>
+
+<file path=ppt/slides/slide24.xml><?xml version="1.0" encoding="utf-8"?>
+<p:sld xmlns:a="http://schemas.openxmlformats.org/drawingml/2006/main" xmlns:p="http://schemas.openxmlformats.org/presentationml/2006/main" xmlns:r="http://schemas.openxmlformats.org/officeDocument/2006/relationships">
+  <p:cSld>
+    <p:spTree>
+      <p:nvGrpSpPr>
+        <p:cNvPr id="1" name=""/>
+        <p:cNvGrpSpPr/>
+        <p:nvPr/>
+      </p:nvGrpSpPr>
+      <p:grpSpPr/>
+      <p:sp>
+        <p:nvSpPr>
+          <p:cNvPr id="2" name="Title 1"/>
+          <p:cNvSpPr>
+            <a:spLocks noGrp="1"/>
+          </p:cNvSpPr>
+          <p:nvPr>
+            <p:ph type="title"/>
+          </p:nvPr>
+        </p:nvSpPr>
+        <p:spPr/>
+        <p:txBody>
+          <a:bodyPr/>
+          <a:lstStyle/>
+          <a:p>
+            <a:r>
+              <a:t>23. Extensibility &amp; Future Roadmap</a:t>
+            </a:r>
+          </a:p>
+        </p:txBody>
+      </p:sp>
+      <p:sp>
+        <p:nvSpPr>
+          <p:cNvPr id="3" name="Content Placeholder 2"/>
+          <p:cNvSpPr>
+            <a:spLocks noGrp="1"/>
+          </p:cNvSpPr>
+          <p:nvPr>
+            <p:ph idx="1"/>
+          </p:nvPr>
+        </p:nvSpPr>
+        <p:spPr/>
+        <p:txBody>
+          <a:bodyPr/>
+          <a:lstStyle/>
+          <a:p>
+            <a:r>
+              <a:t>Keyword classifiers can be seamlessly upgraded to fine-tuned LLMs.</a:t>
+            </a:r>
+          </a:p>
+          <a:p>
+            <a:pPr/>
+            <a:r>
+              <a:t>New regions (e.g., US NIST, APAC rules) easily injected into Supabase.</a:t>
+            </a:r>
+          </a:p>
+          <a:p>
+            <a:pPr/>
+            <a:r>
+              <a:t>Direct integration with CI/CD pipelines to scan 'Policy-as-Code'.</a:t>
+            </a:r>
+          </a:p>
+          <a:p>
+            <a:pPr/>
+            <a:r>
+              <a:t>Multi-lingual embedding models for non-English regulatory texts.</a:t>
+            </a:r>
+          </a:p>
+        </p:txBody>
+      </p:sp>
+    </p:spTree>
+  </p:cSld>
+  <p:clrMapOvr>
+    <a:masterClrMapping/>
+  </p:clrMapOvr>
+</p:sld>
+</file>
+
+<file path=ppt/slides/slide25.xml><?xml version="1.0" encoding="utf-8"?>
+<p:sld xmlns:a="http://schemas.openxmlformats.org/drawingml/2006/main" xmlns:p="http://schemas.openxmlformats.org/presentationml/2006/main" xmlns:r="http://schemas.openxmlformats.org/officeDocument/2006/relationships">
+  <p:cSld>
+    <p:spTree>
+      <p:nvGrpSpPr>
+        <p:cNvPr id="1" name=""/>
+        <p:cNvGrpSpPr/>
+        <p:nvPr/>
+      </p:nvGrpSpPr>
+      <p:grpSpPr/>
+      <p:sp>
+        <p:nvSpPr>
+          <p:cNvPr id="2" name="Title 1"/>
+          <p:cNvSpPr>
+            <a:spLocks noGrp="1"/>
+          </p:cNvSpPr>
+          <p:nvPr>
+            <p:ph type="title"/>
+          </p:nvPr>
+        </p:nvSpPr>
+        <p:spPr/>
+        <p:txBody>
+          <a:bodyPr/>
+          <a:lstStyle/>
+          <a:p>
+            <a:r>
+              <a:t>24. Business Value &amp; Impact</a:t>
+            </a:r>
+          </a:p>
+        </p:txBody>
+      </p:sp>
+      <p:sp>
+        <p:nvSpPr>
+          <p:cNvPr id="3" name="Content Placeholder 2"/>
+          <p:cNvSpPr>
+            <a:spLocks noGrp="1"/>
+          </p:cNvSpPr>
+          <p:nvPr>
+            <p:ph idx="1"/>
+          </p:nvPr>
+        </p:nvSpPr>
+        <p:spPr/>
+        <p:txBody>
+          <a:bodyPr/>
+          <a:lstStyle/>
+          <a:p>
+            <a:r>
+              <a:t>Accelerates compliance audits from weeks to seconds.</a:t>
+            </a:r>
+          </a:p>
+          <a:p>
+            <a:pPr/>
+            <a:r>
+              <a:t>Reduces cross-border legal risk for multinational AI rollouts.</a:t>
+            </a:r>
+          </a:p>
+          <a:p>
+            <a:pPr/>
+            <a:r>
+              <a:t>Provides unified visibility into the organization's regulatory posture.</a:t>
+            </a:r>
+          </a:p>
+          <a:p>
+            <a:pPr/>
+            <a:r>
+              <a:t>Ensures decisions are grounded in actual, current legislation.</a:t>
+            </a:r>
+          </a:p>
+        </p:txBody>
+      </p:sp>
+    </p:spTree>
+  </p:cSld>
+  <p:clrMapOvr>
+    <a:masterClrMapping/>
+  </p:clrMapOvr>
+</p:sld>
+</file>
+
+<file path=ppt/slides/slide26.xml><?xml version="1.0" encoding="utf-8"?>
+<p:sld xmlns:a="http://schemas.openxmlformats.org/drawingml/2006/main" xmlns:p="http://schemas.openxmlformats.org/presentationml/2006/main" xmlns:r="http://schemas.openxmlformats.org/officeDocument/2006/relationships">
+  <p:cSld>
+    <p:spTree>
+      <p:nvGrpSpPr>
+        <p:cNvPr id="1" name=""/>
+        <p:cNvGrpSpPr/>
+        <p:nvPr/>
+      </p:nvGrpSpPr>
+      <p:grpSpPr/>
+      <p:sp>
+        <p:nvSpPr>
+          <p:cNvPr id="2" name="Title 1"/>
+          <p:cNvSpPr>
+            <a:spLocks noGrp="1"/>
+          </p:cNvSpPr>
+          <p:nvPr>
+            <p:ph type="title"/>
+          </p:nvPr>
+        </p:nvSpPr>
+        <p:spPr/>
+        <p:txBody>
+          <a:bodyPr/>
+          <a:lstStyle/>
+          <a:p>
+            <a:r>
+              <a:t>25. Conclusion</a:t>
             </a:r>
           </a:p>
         </p:txBody>
@@ -4763,7 +5000,7 @@
           <a:lstStyle/>
           <a:p>
             <a:r>
-              <a:t>7. The Legal Data Layer</a:t>
+              <a:t>7. Privacy &amp; Security Posture</a:t>
             </a:r>
           </a:p>
         </p:txBody>
@@ -4784,25 +5021,25 @@
           <a:lstStyle/>
           <a:p>
             <a:r>
-              <a:t>Powered by Supabase (PostgreSQL) for structured storage.</a:t>
-            </a:r>
-          </a:p>
-          <a:p>
-            <a:pPr/>
-            <a:r>
-              <a:t>Contains 5,000+ meticulously extracted clauses from global tech laws.</a:t>
-            </a:r>
-          </a:p>
-          <a:p>
-            <a:pPr/>
-            <a:r>
-              <a:t>Sources: EUR-Lex (EU AI Act) and India Code (IT Act, DPDP).</a:t>
-            </a:r>
-          </a:p>
-          <a:p>
-            <a:pPr/>
-            <a:r>
-              <a:t>Provides grounded, verifiable evidence for every flagged issue.</a:t>
+              <a:t>Zero External Model APIs: No draft policies are sent to OpenAI or Anthropic.</a:t>
+            </a:r>
+          </a:p>
+          <a:p>
+            <a:pPr/>
+            <a:r>
+              <a:t>Local Execution: Embeddings generated locally securely via Sentence-Transformers.</a:t>
+            </a:r>
+          </a:p>
+          <a:p>
+            <a:pPr/>
+            <a:r>
+              <a:t>Role-Based Access: Supabase RLS protects compiled legislative data.</a:t>
+            </a:r>
+          </a:p>
+          <a:p>
+            <a:pPr/>
+            <a:r>
+              <a:t>Data Sovereignty: Ensures sensitive unreleased policies remain within the internal network boundary.</a:t>
             </a:r>
           </a:p>
         </p:txBody>
@@ -4841,7 +5078,7 @@
           <a:lstStyle/>
           <a:p>
             <a:r>
-              <a:t>8. Vector Search &amp; Embeddings</a:t>
+              <a:t>8. The Legal Data Layer</a:t>
             </a:r>
           </a:p>
         </p:txBody>
@@ -4862,25 +5099,25 @@
           <a:lstStyle/>
           <a:p>
             <a:r>
-              <a:t>Utilizes 'all-MiniLM-L6-v2' for fast, lightweight embedding generation.</a:t>
-            </a:r>
-          </a:p>
-          <a:p>
-            <a:pPr/>
-            <a:r>
-              <a:t>Creates 384-dimensional dense vectors for semantic similarity.</a:t>
-            </a:r>
-          </a:p>
-          <a:p>
-            <a:pPr/>
-            <a:r>
-              <a:t>FAISS IndexFlatIP used for rapid nearest-neighbor retrieval.</a:t>
-            </a:r>
-          </a:p>
-          <a:p>
-            <a:pPr/>
-            <a:r>
-              <a:t>Enables context-aware matching beyond exact keyword searches.</a:t>
+              <a:t>Powered by Supabase (PostgreSQL) for structured storage.</a:t>
+            </a:r>
+          </a:p>
+          <a:p>
+            <a:pPr/>
+            <a:r>
+              <a:t>Contains 5,000+ meticulously extracted clauses from global tech laws.</a:t>
+            </a:r>
+          </a:p>
+          <a:p>
+            <a:pPr/>
+            <a:r>
+              <a:t>Sources: EUR-Lex (EU AI Act) and India Code (IT Act, DPDP).</a:t>
+            </a:r>
+          </a:p>
+          <a:p>
+            <a:pPr/>
+            <a:r>
+              <a:t>Provides grounded, verifiable evidence for every flagged issue.</a:t>
             </a:r>
           </a:p>
         </p:txBody>
